--- a/output/education/2026-03-24_cbme-epa-reform/cbme-epa-reform_slides_attendings.pptx
+++ b/output/education/2026-03-24_cbme-epa-reform/cbme-epa-reform_slides_attendings.pptx
@@ -3112,7 +3112,7 @@
         <p:spPr>
           <a:xfrm>
             <a:off x="731520" y="365760"/>
-            <a:ext cx="7680960" cy="731520"/>
+            <a:ext cx="7680960" cy="838200"/>
           </a:xfrm>
           <a:prstGeom prst="rect">
             <a:avLst/>
@@ -3134,6 +3134,7 @@
               </a:defRPr>
             </a:pPr>
             <a:r>
+              <a:rPr/>
               <a:t>CBE / EPA</a:t>
             </a:r>
           </a:p>
@@ -3147,7 +3148,7 @@
         </p:nvSpPr>
         <p:spPr>
           <a:xfrm>
-            <a:off x="731520" y="1005840"/>
+            <a:off x="731520" y="1222248"/>
             <a:ext cx="7680960" cy="457200"/>
           </a:xfrm>
           <a:prstGeom prst="rect">
@@ -3170,6 +3171,7 @@
               </a:defRPr>
             </a:pPr>
             <a:r>
+              <a:rPr/>
               <a:t>Competency-Based Education / Entrustable Professional Activity</a:t>
             </a:r>
           </a:p>
@@ -3183,7 +3185,7 @@
         </p:nvSpPr>
         <p:spPr>
           <a:xfrm>
-            <a:off x="731520" y="1554480"/>
+            <a:off x="731520" y="1697736"/>
             <a:ext cx="7680960" cy="457200"/>
           </a:xfrm>
           <a:prstGeom prst="rect">
@@ -3206,6 +3208,7 @@
               </a:defRPr>
             </a:pPr>
             <a:r>
+              <a:rPr/>
               <a:t>コンピテンシー基盤型教育とEPA -- 「点数」から「できること」へ</a:t>
             </a:r>
           </a:p>
@@ -3250,7 +3253,9 @@
           <a:bodyPr rtlCol="0" anchor="ctr"/>
           <a:lstStyle/>
           <a:p>
-            <a:pPr algn="ctr"/>
+            <a:pPr algn="ctr">
+              <a:defRPr/>
+            </a:pPr>
           </a:p>
         </p:txBody>
       </p:sp>
@@ -3285,6 +3290,7 @@
               </a:defRPr>
             </a:pPr>
             <a:r>
+              <a:rPr/>
               <a:t>指導医・プログラムディレクター向け｜30分｜2026-03-24</a:t>
             </a:r>
           </a:p>
@@ -3347,6 +3353,7 @@
               </a:defRPr>
             </a:pPr>
             <a:r>
+              <a:rPr/>
               <a:t>導入の問い</a:t>
             </a:r>
           </a:p>
@@ -3391,7 +3398,9 @@
           <a:bodyPr rtlCol="0" anchor="ctr"/>
           <a:lstStyle/>
           <a:p>
-            <a:pPr algn="ctr"/>
+            <a:pPr algn="ctr">
+              <a:defRPr/>
+            </a:pPr>
           </a:p>
         </p:txBody>
       </p:sp>
@@ -3436,7 +3445,9 @@
           <a:bodyPr rtlCol="0" anchor="ctr"/>
           <a:lstStyle/>
           <a:p>
-            <a:pPr algn="ctr"/>
+            <a:pPr algn="ctr">
+              <a:defRPr/>
+            </a:pPr>
           </a:p>
         </p:txBody>
       </p:sp>
@@ -3471,14 +3482,17 @@
               </a:defRPr>
             </a:pPr>
             <a:r>
+              <a:rPr/>
               <a:t>USMLE（米国医師国家試験）で高得点の研修医が、</a:t>
             </a:r>
             <a:br/>
             <a:r>
+              <a:rPr/>
               <a:t>必ずしも「良い医師」になるとは限らない。</a:t>
             </a:r>
             <a:br/>
             <a:r>
+              <a:rPr/>
               <a:t>-- では、何で評価すればいいのか？</a:t>
             </a:r>
           </a:p>
@@ -3493,7 +3507,7 @@
         <p:spPr>
           <a:xfrm>
             <a:off x="731520" y="2194560"/>
-            <a:ext cx="7315200" cy="365760"/>
+            <a:ext cx="7315200" cy="375920"/>
           </a:xfrm>
           <a:prstGeom prst="rect">
             <a:avLst/>
@@ -3515,6 +3529,7 @@
               </a:defRPr>
             </a:pPr>
             <a:r>
+              <a:rPr/>
               <a:t>この30分の後、あなたは：</a:t>
             </a:r>
           </a:p>
@@ -3552,6 +3567,7 @@
               <a:buChar char="●"/>
             </a:pPr>
             <a:r>
+              <a:rPr/>
               <a:t>CBE = Competency-Based Education（コンピテンシー基盤型教育）の基本概念を説明できる</a:t>
             </a:r>
           </a:p>
@@ -3566,6 +3582,7 @@
               <a:buChar char="●"/>
             </a:pPr>
             <a:r>
+              <a:rPr/>
               <a:t>EPA = Entrustable Professional Activity（任せられる専門的活動）とマイルストーン評価を理解できる</a:t>
             </a:r>
           </a:p>
@@ -3580,6 +3597,7 @@
               <a:buChar char="●"/>
             </a:pPr>
             <a:r>
+              <a:rPr/>
               <a:t>自分の指導・研修にCBEの要素を1つ取り入れる計画を立てられる</a:t>
             </a:r>
           </a:p>
@@ -3620,7 +3638,7 @@
         <p:spPr>
           <a:xfrm>
             <a:off x="731520" y="274320"/>
-            <a:ext cx="7315200" cy="457200"/>
+            <a:ext cx="7315200" cy="518159"/>
           </a:xfrm>
           <a:prstGeom prst="rect">
             <a:avLst/>
@@ -3642,6 +3660,7 @@
               </a:defRPr>
             </a:pPr>
             <a:r>
+              <a:rPr/>
               <a:t>試験の点数は何を予測するのか？</a:t>
             </a:r>
           </a:p>
@@ -4074,7 +4093,9 @@
           <a:bodyPr rtlCol="0" anchor="ctr"/>
           <a:lstStyle/>
           <a:p>
-            <a:pPr algn="ctr"/>
+            <a:pPr algn="ctr">
+              <a:defRPr/>
+            </a:pPr>
           </a:p>
         </p:txBody>
       </p:sp>
@@ -4119,7 +4140,9 @@
           <a:bodyPr rtlCol="0" anchor="ctr"/>
           <a:lstStyle/>
           <a:p>
-            <a:pPr algn="ctr"/>
+            <a:pPr algn="ctr">
+              <a:defRPr/>
+            </a:pPr>
           </a:p>
         </p:txBody>
       </p:sp>
@@ -4154,10 +4177,12 @@
               </a:defRPr>
             </a:pPr>
             <a:r>
+              <a:rPr/>
               <a:t>「試験に受かる力」と「患者を診る力」は別物。</a:t>
             </a:r>
             <a:br/>
             <a:r>
+              <a:rPr/>
               <a:t>このギャップを埋めるのがCBE。</a:t>
             </a:r>
           </a:p>
@@ -4198,7 +4223,7 @@
         <p:spPr>
           <a:xfrm>
             <a:off x="731520" y="274320"/>
-            <a:ext cx="7315200" cy="457200"/>
+            <a:ext cx="7315200" cy="518159"/>
           </a:xfrm>
           <a:prstGeom prst="rect">
             <a:avLst/>
@@ -4220,6 +4245,7 @@
               </a:defRPr>
             </a:pPr>
             <a:r>
+              <a:rPr/>
               <a:t>CBE（コンピテンシー基盤型教育）とは何か</a:t>
             </a:r>
           </a:p>
@@ -4650,6 +4676,7 @@
               </a:defRPr>
             </a:pPr>
             <a:r>
+              <a:rPr/>
               <a:t>CBE = 「何年研修したか」ではなく「何ができるようになったか」で評価する仕組み</a:t>
             </a:r>
           </a:p>
@@ -4690,7 +4717,7 @@
         <p:spPr>
           <a:xfrm>
             <a:off x="731520" y="274320"/>
-            <a:ext cx="7315200" cy="457200"/>
+            <a:ext cx="7315200" cy="518159"/>
           </a:xfrm>
           <a:prstGeom prst="rect">
             <a:avLst/>
@@ -4712,6 +4739,7 @@
               </a:defRPr>
             </a:pPr>
             <a:r>
+              <a:rPr/>
               <a:t>EPA -- 「任せられる」を段階的に評価する</a:t>
             </a:r>
           </a:p>
@@ -4725,8 +4753,8 @@
         </p:nvSpPr>
         <p:spPr>
           <a:xfrm>
-            <a:off x="731520" y="731520"/>
-            <a:ext cx="7315200" cy="274320"/>
+            <a:off x="731520" y="810767"/>
+            <a:ext cx="7315200" cy="287020"/>
           </a:xfrm>
           <a:prstGeom prst="rect">
             <a:avLst/>
@@ -4748,6 +4776,7 @@
               </a:defRPr>
             </a:pPr>
             <a:r>
+              <a:rPr/>
               <a:t>EPA = Entrustable Professional Activity（任せられる専門的活動）</a:t>
             </a:r>
           </a:p>
@@ -4794,7 +4823,9 @@
           <a:bodyPr rtlCol="0" anchor="ctr"/>
           <a:lstStyle/>
           <a:p>
-            <a:pPr algn="ctr"/>
+            <a:pPr algn="ctr">
+              <a:defRPr/>
+            </a:pPr>
           </a:p>
         </p:txBody>
       </p:sp>
@@ -4837,7 +4868,9 @@
           <a:bodyPr rtlCol="0" anchor="ctr"/>
           <a:lstStyle/>
           <a:p>
-            <a:pPr algn="ctr"/>
+            <a:pPr algn="ctr">
+              <a:defRPr/>
+            </a:pPr>
           </a:p>
         </p:txBody>
       </p:sp>
@@ -4849,7 +4882,7 @@
         </p:nvSpPr>
         <p:spPr>
           <a:xfrm>
-            <a:off x="868680" y="1097280"/>
+            <a:off x="868680" y="1116075"/>
             <a:ext cx="914400" cy="365760"/>
           </a:xfrm>
           <a:prstGeom prst="rect">
@@ -4872,6 +4905,7 @@
               </a:defRPr>
             </a:pPr>
             <a:r>
+              <a:rPr/>
               <a:t>Level 1</a:t>
             </a:r>
           </a:p>
@@ -4885,7 +4919,7 @@
         </p:nvSpPr>
         <p:spPr>
           <a:xfrm>
-            <a:off x="1828800" y="1097280"/>
+            <a:off x="1828800" y="1116075"/>
             <a:ext cx="1828800" cy="365760"/>
           </a:xfrm>
           <a:prstGeom prst="rect">
@@ -4908,6 +4942,7 @@
               </a:defRPr>
             </a:pPr>
             <a:r>
+              <a:rPr/>
               <a:t>観察のみ</a:t>
             </a:r>
           </a:p>
@@ -4921,7 +4956,7 @@
         </p:nvSpPr>
         <p:spPr>
           <a:xfrm>
-            <a:off x="3840480" y="1097280"/>
+            <a:off x="3840480" y="1116075"/>
             <a:ext cx="4389120" cy="365760"/>
           </a:xfrm>
           <a:prstGeom prst="rect">
@@ -4944,6 +4979,7 @@
               </a:defRPr>
             </a:pPr>
             <a:r>
+              <a:rPr/>
               <a:t>見学している段階</a:t>
             </a:r>
           </a:p>
@@ -4990,7 +5026,9 @@
           <a:bodyPr rtlCol="0" anchor="ctr"/>
           <a:lstStyle/>
           <a:p>
-            <a:pPr algn="ctr"/>
+            <a:pPr algn="ctr">
+              <a:defRPr/>
+            </a:pPr>
           </a:p>
         </p:txBody>
       </p:sp>
@@ -5033,7 +5071,9 @@
           <a:bodyPr rtlCol="0" anchor="ctr"/>
           <a:lstStyle/>
           <a:p>
-            <a:pPr algn="ctr"/>
+            <a:pPr algn="ctr">
+              <a:defRPr/>
+            </a:pPr>
           </a:p>
         </p:txBody>
       </p:sp>
@@ -5068,6 +5108,7 @@
               </a:defRPr>
             </a:pPr>
             <a:r>
+              <a:rPr/>
               <a:t>Level 2</a:t>
             </a:r>
           </a:p>
@@ -5104,6 +5145,7 @@
               </a:defRPr>
             </a:pPr>
             <a:r>
+              <a:rPr/>
               <a:t>直接指導下</a:t>
             </a:r>
           </a:p>
@@ -5140,6 +5182,7 @@
               </a:defRPr>
             </a:pPr>
             <a:r>
+              <a:rPr/>
               <a:t>指導医が横で見ている</a:t>
             </a:r>
           </a:p>
@@ -5186,7 +5229,9 @@
           <a:bodyPr rtlCol="0" anchor="ctr"/>
           <a:lstStyle/>
           <a:p>
-            <a:pPr algn="ctr"/>
+            <a:pPr algn="ctr">
+              <a:defRPr/>
+            </a:pPr>
           </a:p>
         </p:txBody>
       </p:sp>
@@ -5229,7 +5274,9 @@
           <a:bodyPr rtlCol="0" anchor="ctr"/>
           <a:lstStyle/>
           <a:p>
-            <a:pPr algn="ctr"/>
+            <a:pPr algn="ctr">
+              <a:defRPr/>
+            </a:pPr>
           </a:p>
         </p:txBody>
       </p:sp>
@@ -5264,6 +5311,7 @@
               </a:defRPr>
             </a:pPr>
             <a:r>
+              <a:rPr/>
               <a:t>Level 3</a:t>
             </a:r>
           </a:p>
@@ -5300,6 +5348,7 @@
               </a:defRPr>
             </a:pPr>
             <a:r>
+              <a:rPr/>
               <a:t>間接指導下</a:t>
             </a:r>
           </a:p>
@@ -5336,6 +5385,7 @@
               </a:defRPr>
             </a:pPr>
             <a:r>
+              <a:rPr/>
               <a:t>一人でやって後で確認</a:t>
             </a:r>
           </a:p>
@@ -5382,7 +5432,9 @@
           <a:bodyPr rtlCol="0" anchor="ctr"/>
           <a:lstStyle/>
           <a:p>
-            <a:pPr algn="ctr"/>
+            <a:pPr algn="ctr">
+              <a:defRPr/>
+            </a:pPr>
           </a:p>
         </p:txBody>
       </p:sp>
@@ -5425,7 +5477,9 @@
           <a:bodyPr rtlCol="0" anchor="ctr"/>
           <a:lstStyle/>
           <a:p>
-            <a:pPr algn="ctr"/>
+            <a:pPr algn="ctr">
+              <a:defRPr/>
+            </a:pPr>
           </a:p>
         </p:txBody>
       </p:sp>
@@ -5460,6 +5514,7 @@
               </a:defRPr>
             </a:pPr>
             <a:r>
+              <a:rPr/>
               <a:t>Level 4</a:t>
             </a:r>
           </a:p>
@@ -5496,6 +5551,7 @@
               </a:defRPr>
             </a:pPr>
             <a:r>
+              <a:rPr/>
               <a:t>自立実施</a:t>
             </a:r>
           </a:p>
@@ -5532,6 +5588,7 @@
               </a:defRPr>
             </a:pPr>
             <a:r>
+              <a:rPr/>
               <a:t>任せられる！</a:t>
             </a:r>
           </a:p>
@@ -5578,7 +5635,9 @@
           <a:bodyPr rtlCol="0" anchor="ctr"/>
           <a:lstStyle/>
           <a:p>
-            <a:pPr algn="ctr"/>
+            <a:pPr algn="ctr">
+              <a:defRPr/>
+            </a:pPr>
           </a:p>
         </p:txBody>
       </p:sp>
@@ -5621,7 +5680,9 @@
           <a:bodyPr rtlCol="0" anchor="ctr"/>
           <a:lstStyle/>
           <a:p>
-            <a:pPr algn="ctr"/>
+            <a:pPr algn="ctr">
+              <a:defRPr/>
+            </a:pPr>
           </a:p>
         </p:txBody>
       </p:sp>
@@ -5656,6 +5717,7 @@
               </a:defRPr>
             </a:pPr>
             <a:r>
+              <a:rPr/>
               <a:t>Level 5</a:t>
             </a:r>
           </a:p>
@@ -5692,6 +5754,7 @@
               </a:defRPr>
             </a:pPr>
             <a:r>
+              <a:rPr/>
               <a:t>他者を指導</a:t>
             </a:r>
           </a:p>
@@ -5728,6 +5791,7 @@
               </a:defRPr>
             </a:pPr>
             <a:r>
+              <a:rPr/>
               <a:t>教える側になる</a:t>
             </a:r>
           </a:p>
@@ -5764,6 +5828,7 @@
               </a:defRPr>
             </a:pPr>
             <a:r>
+              <a:rPr/>
               <a:t>「この研修医にこの行動を任せられるか？」が評価の核心</a:t>
             </a:r>
           </a:p>
@@ -5804,7 +5869,7 @@
         <p:spPr>
           <a:xfrm>
             <a:off x="731520" y="274320"/>
-            <a:ext cx="7315200" cy="457200"/>
+            <a:ext cx="7315200" cy="518159"/>
           </a:xfrm>
           <a:prstGeom prst="rect">
             <a:avLst/>
@@ -5826,6 +5891,7 @@
               </a:defRPr>
             </a:pPr>
             <a:r>
+              <a:rPr/>
               <a:t>「評価者」から「コーチ」へ</a:t>
             </a:r>
           </a:p>
@@ -6264,7 +6330,9 @@
           <a:bodyPr rtlCol="0" anchor="ctr"/>
           <a:lstStyle/>
           <a:p>
-            <a:pPr algn="ctr"/>
+            <a:pPr algn="ctr">
+              <a:defRPr/>
+            </a:pPr>
           </a:p>
         </p:txBody>
       </p:sp>
@@ -6309,7 +6377,9 @@
           <a:bodyPr rtlCol="0" anchor="ctr"/>
           <a:lstStyle/>
           <a:p>
-            <a:pPr algn="ctr"/>
+            <a:pPr algn="ctr">
+              <a:defRPr/>
+            </a:pPr>
           </a:p>
         </p:txBody>
       </p:sp>
@@ -6344,10 +6414,12 @@
               </a:defRPr>
             </a:pPr>
             <a:r>
+              <a:rPr/>
               <a:t>「あの先生は厳しい」と言われる指導医から、</a:t>
             </a:r>
             <a:br/>
             <a:r>
+              <a:rPr/>
               <a:t>「あの先生がいると安心」と言われるコーチへ。</a:t>
             </a:r>
           </a:p>
@@ -6388,7 +6460,7 @@
         <p:spPr>
           <a:xfrm>
             <a:off x="731520" y="274320"/>
-            <a:ext cx="7315200" cy="457200"/>
+            <a:ext cx="7315200" cy="518159"/>
           </a:xfrm>
           <a:prstGeom prst="rect">
             <a:avLst/>
@@ -6410,6 +6482,7 @@
               </a:defRPr>
             </a:pPr>
             <a:r>
+              <a:rPr/>
               <a:t>日本での動き</a:t>
             </a:r>
           </a:p>
@@ -6447,6 +6520,7 @@
               <a:buChar char="●"/>
             </a:pPr>
             <a:r>
+              <a:rPr/>
               <a:t>総合診療専門医制度（2017年〜）でEPA的評価が導入され始めている</a:t>
             </a:r>
           </a:p>
@@ -6461,6 +6535,7 @@
               <a:buChar char="●"/>
             </a:pPr>
             <a:r>
+              <a:rPr/>
               <a:t>初期研修の「行動目標」が実質的なEPAに相当</a:t>
             </a:r>
           </a:p>
@@ -6475,6 +6550,7 @@
               <a:buChar char="●"/>
             </a:pPr>
             <a:r>
+              <a:rPr/>
               <a:t>USMLE Step 1の「Pass/Fail」化（2022年）が全米で「点数から能力へ」の潮流を加速</a:t>
             </a:r>
           </a:p>
@@ -6489,6 +6565,7 @@
               <a:buChar char="●"/>
             </a:pPr>
             <a:r>
+              <a:rPr/>
               <a:t>日本のOSCE（客観的臨床能力試験）も「できる」を測る方向へ進化中</a:t>
             </a:r>
           </a:p>
@@ -6503,6 +6580,7 @@
               <a:buChar char="●"/>
             </a:pPr>
             <a:r>
+              <a:rPr/>
               <a:t>3/22のAI教育RCT（保持率91%）が示すように、AIがCBEを支援する時代が来ている</a:t>
             </a:r>
           </a:p>
@@ -6539,6 +6617,7 @@
               </a:defRPr>
             </a:pPr>
             <a:r>
+              <a:rPr/>
               <a:t>「点数で評価」から「任せられるかで評価」への転換は、日本でも始まっている</a:t>
             </a:r>
           </a:p>
@@ -6579,7 +6658,7 @@
         <p:spPr>
           <a:xfrm>
             <a:off x="731520" y="274320"/>
-            <a:ext cx="7315200" cy="457200"/>
+            <a:ext cx="7315200" cy="589279"/>
           </a:xfrm>
           <a:prstGeom prst="rect">
             <a:avLst/>
@@ -6601,6 +6680,7 @@
               </a:defRPr>
             </a:pPr>
             <a:r>
+              <a:rPr/>
               <a:t>ディスカッション</a:t>
             </a:r>
           </a:p>
@@ -6614,8 +6694,8 @@
         </p:nvSpPr>
         <p:spPr>
           <a:xfrm>
-            <a:off x="731520" y="731520"/>
-            <a:ext cx="2743200" cy="320040"/>
+            <a:off x="731520" y="881887"/>
+            <a:ext cx="2743200" cy="340360"/>
           </a:xfrm>
           <a:prstGeom prst="rect">
             <a:avLst/>
@@ -6637,6 +6717,7 @@
               </a:defRPr>
             </a:pPr>
             <a:r>
+              <a:rPr/>
               <a:t>4分間 → 全体共有 2分</a:t>
             </a:r>
           </a:p>
@@ -6681,7 +6762,9 @@
           <a:bodyPr rtlCol="0" anchor="ctr"/>
           <a:lstStyle/>
           <a:p>
-            <a:pPr algn="ctr"/>
+            <a:pPr algn="ctr">
+              <a:defRPr/>
+            </a:pPr>
           </a:p>
         </p:txBody>
       </p:sp>
@@ -6726,7 +6809,9 @@
           <a:bodyPr rtlCol="0" anchor="ctr"/>
           <a:lstStyle/>
           <a:p>
-            <a:pPr algn="ctr"/>
+            <a:pPr algn="ctr">
+              <a:defRPr/>
+            </a:pPr>
           </a:p>
         </p:txBody>
       </p:sp>
@@ -6761,14 +6846,17 @@
               </a:defRPr>
             </a:pPr>
             <a:r>
+              <a:rPr/>
               <a:t>あなたの研修現場で、</a:t>
             </a:r>
             <a:br/>
             <a:r>
+              <a:rPr/>
               <a:t>「点数では測れないが、医師として重要な能力」は何か？</a:t>
             </a:r>
             <a:br/>
             <a:r>
+              <a:rPr/>
               <a:t>それをどう評価すればいい？</a:t>
             </a:r>
           </a:p>
@@ -6783,7 +6871,7 @@
         <p:spPr>
           <a:xfrm>
             <a:off x="731520" y="2468880"/>
-            <a:ext cx="2743200" cy="274320"/>
+            <a:ext cx="2743200" cy="340360"/>
           </a:xfrm>
           <a:prstGeom prst="rect">
             <a:avLst/>
@@ -6805,6 +6893,7 @@
               </a:defRPr>
             </a:pPr>
             <a:r>
+              <a:rPr/>
               <a:t>明日からの1アクション</a:t>
             </a:r>
           </a:p>
@@ -6818,7 +6907,7 @@
         </p:nvSpPr>
         <p:spPr>
           <a:xfrm>
-            <a:off x="731520" y="2788920"/>
+            <a:off x="731520" y="2827528"/>
             <a:ext cx="7680960" cy="1645920"/>
           </a:xfrm>
           <a:prstGeom prst="rect">
@@ -6842,6 +6931,7 @@
               <a:buChar char="●"/>
             </a:pPr>
             <a:r>
+              <a:rPr/>
               <a:t>研修医の「できること」を1つ、EPAのLevelで評価してみる</a:t>
             </a:r>
           </a:p>
@@ -6856,6 +6946,7 @@
               <a:buChar char="●"/>
             </a:pPr>
             <a:r>
+              <a:rPr/>
               <a:t>「できなかったこと」ではなく「できたこと」をフィードバックする</a:t>
             </a:r>
           </a:p>
@@ -6870,6 +6961,7 @@
               <a:buChar char="●"/>
             </a:pPr>
             <a:r>
+              <a:rPr/>
               <a:t>「次はこれを任せてみようか」という対話を、1回してみる</a:t>
             </a:r>
           </a:p>
